--- a/5th Semester/ma'am assignment/streaming_GUI/Final_Project_Presentation.pptx
+++ b/5th Semester/ma'am assignment/streaming_GUI/Final_Project_Presentation.pptx
@@ -5,16 +5,16 @@
     <p:sldMasterId id="2147483648" r:id="rId1"/>
   </p:sldMasterIdLst>
   <p:sldIdLst>
-    <p:sldId id="256" r:id="rId7"/>
-    <p:sldId id="257" r:id="rId8"/>
-    <p:sldId id="258" r:id="rId9"/>
-    <p:sldId id="259" r:id="rId10"/>
-    <p:sldId id="260" r:id="rId11"/>
-    <p:sldId id="261" r:id="rId12"/>
-    <p:sldId id="262" r:id="rId13"/>
-    <p:sldId id="263" r:id="rId14"/>
-    <p:sldId id="264" r:id="rId15"/>
-    <p:sldId id="265" r:id="rId16"/>
+    <p:sldId id="256" r:id="rId2"/>
+    <p:sldId id="257" r:id="rId3"/>
+    <p:sldId id="258" r:id="rId4"/>
+    <p:sldId id="259" r:id="rId5"/>
+    <p:sldId id="260" r:id="rId6"/>
+    <p:sldId id="261" r:id="rId7"/>
+    <p:sldId id="262" r:id="rId8"/>
+    <p:sldId id="263" r:id="rId9"/>
+    <p:sldId id="264" r:id="rId10"/>
+    <p:sldId id="265" r:id="rId11"/>
   </p:sldIdLst>
   <p:sldSz cx="9144000" cy="6858000" type="screen4x3"/>
   <p:notesSz cx="6858000" cy="9144000"/>
@@ -113,6 +113,22 @@
       </a:defRPr>
     </a:lvl9pPr>
   </p:defaultTextStyle>
+  <p:extLst>
+    <p:ext uri="{EFAFB233-063F-42B5-8137-9DF3F51BA10A}">
+      <p15:sldGuideLst xmlns:p15="http://schemas.microsoft.com/office/powerpoint/2012/main">
+        <p15:guide id="1" orient="horz" pos="2160">
+          <p15:clr>
+            <a:srgbClr val="A4A3A4"/>
+          </p15:clr>
+        </p15:guide>
+        <p15:guide id="2" pos="2880">
+          <p15:clr>
+            <a:srgbClr val="A4A3A4"/>
+          </p15:clr>
+        </p15:guide>
+      </p15:sldGuideLst>
+    </p:ext>
+  </p:extLst>
 </p:presentation>
 </file>
 
@@ -154,10 +170,9 @@
           <a:lstStyle/>
           <a:p>
             <a:r>
-              <a:rPr lang="en-US" smtClean="0"/>
+              <a:rPr lang="en-US"/>
               <a:t>Click to edit Master title style</a:t>
             </a:r>
-            <a:endParaRPr lang="en-US"/>
           </a:p>
         </p:txBody>
       </p:sp>
@@ -273,10 +288,9 @@
           </a:lstStyle>
           <a:p>
             <a:r>
-              <a:rPr lang="en-US" smtClean="0"/>
+              <a:rPr lang="en-US"/>
               <a:t>Click to edit Master subtitle style</a:t>
             </a:r>
-            <a:endParaRPr lang="en-US"/>
           </a:p>
         </p:txBody>
       </p:sp>
@@ -297,7 +311,7 @@
           <a:p>
             <a:fld id="{5BCAD085-E8A6-8845-BD4E-CB4CCA059FC4}" type="datetimeFigureOut">
               <a:rPr lang="en-US" smtClean="0"/>
-              <a:t>1/27/13</a:t>
+              <a:t>11/21/2025</a:t>
             </a:fld>
             <a:endParaRPr lang="en-US"/>
           </a:p>
@@ -391,10 +405,9 @@
           <a:lstStyle/>
           <a:p>
             <a:r>
-              <a:rPr lang="en-US" smtClean="0"/>
+              <a:rPr lang="en-US"/>
               <a:t>Click to edit Master title style</a:t>
             </a:r>
-            <a:endParaRPr lang="en-US"/>
           </a:p>
         </p:txBody>
       </p:sp>
@@ -415,38 +428,37 @@
           <a:p>
             <a:pPr lvl="0"/>
             <a:r>
-              <a:rPr lang="en-US" smtClean="0"/>
+              <a:rPr lang="en-US"/>
               <a:t>Click to edit Master text styles</a:t>
             </a:r>
           </a:p>
           <a:p>
             <a:pPr lvl="1"/>
             <a:r>
-              <a:rPr lang="en-US" smtClean="0"/>
+              <a:rPr lang="en-US"/>
               <a:t>Second level</a:t>
             </a:r>
           </a:p>
           <a:p>
             <a:pPr lvl="2"/>
             <a:r>
-              <a:rPr lang="en-US" smtClean="0"/>
+              <a:rPr lang="en-US"/>
               <a:t>Third level</a:t>
             </a:r>
           </a:p>
           <a:p>
             <a:pPr lvl="3"/>
             <a:r>
-              <a:rPr lang="en-US" smtClean="0"/>
+              <a:rPr lang="en-US"/>
               <a:t>Fourth level</a:t>
             </a:r>
           </a:p>
           <a:p>
             <a:pPr lvl="4"/>
             <a:r>
-              <a:rPr lang="en-US" smtClean="0"/>
+              <a:rPr lang="en-US"/>
               <a:t>Fifth level</a:t>
             </a:r>
-            <a:endParaRPr lang="en-US"/>
           </a:p>
         </p:txBody>
       </p:sp>
@@ -467,7 +479,7 @@
           <a:p>
             <a:fld id="{5BCAD085-E8A6-8845-BD4E-CB4CCA059FC4}" type="datetimeFigureOut">
               <a:rPr lang="en-US" smtClean="0"/>
-              <a:t>1/27/13</a:t>
+              <a:t>11/21/2025</a:t>
             </a:fld>
             <a:endParaRPr lang="en-US"/>
           </a:p>
@@ -566,10 +578,9 @@
           <a:lstStyle/>
           <a:p>
             <a:r>
-              <a:rPr lang="en-US" smtClean="0"/>
+              <a:rPr lang="en-US"/>
               <a:t>Click to edit Master title style</a:t>
             </a:r>
-            <a:endParaRPr lang="en-US"/>
           </a:p>
         </p:txBody>
       </p:sp>
@@ -595,38 +606,37 @@
           <a:p>
             <a:pPr lvl="0"/>
             <a:r>
-              <a:rPr lang="en-US" smtClean="0"/>
+              <a:rPr lang="en-US"/>
               <a:t>Click to edit Master text styles</a:t>
             </a:r>
           </a:p>
           <a:p>
             <a:pPr lvl="1"/>
             <a:r>
-              <a:rPr lang="en-US" smtClean="0"/>
+              <a:rPr lang="en-US"/>
               <a:t>Second level</a:t>
             </a:r>
           </a:p>
           <a:p>
             <a:pPr lvl="2"/>
             <a:r>
-              <a:rPr lang="en-US" smtClean="0"/>
+              <a:rPr lang="en-US"/>
               <a:t>Third level</a:t>
             </a:r>
           </a:p>
           <a:p>
             <a:pPr lvl="3"/>
             <a:r>
-              <a:rPr lang="en-US" smtClean="0"/>
+              <a:rPr lang="en-US"/>
               <a:t>Fourth level</a:t>
             </a:r>
           </a:p>
           <a:p>
             <a:pPr lvl="4"/>
             <a:r>
-              <a:rPr lang="en-US" smtClean="0"/>
+              <a:rPr lang="en-US"/>
               <a:t>Fifth level</a:t>
             </a:r>
-            <a:endParaRPr lang="en-US"/>
           </a:p>
         </p:txBody>
       </p:sp>
@@ -647,7 +657,7 @@
           <a:p>
             <a:fld id="{5BCAD085-E8A6-8845-BD4E-CB4CCA059FC4}" type="datetimeFigureOut">
               <a:rPr lang="en-US" smtClean="0"/>
-              <a:t>1/27/13</a:t>
+              <a:t>11/21/2025</a:t>
             </a:fld>
             <a:endParaRPr lang="en-US"/>
           </a:p>
@@ -741,10 +751,9 @@
           <a:lstStyle/>
           <a:p>
             <a:r>
-              <a:rPr lang="en-US" smtClean="0"/>
+              <a:rPr lang="en-US"/>
               <a:t>Click to edit Master title style</a:t>
             </a:r>
-            <a:endParaRPr lang="en-US"/>
           </a:p>
         </p:txBody>
       </p:sp>
@@ -765,38 +774,37 @@
           <a:p>
             <a:pPr lvl="0"/>
             <a:r>
-              <a:rPr lang="en-US" smtClean="0"/>
+              <a:rPr lang="en-US"/>
               <a:t>Click to edit Master text styles</a:t>
             </a:r>
           </a:p>
           <a:p>
             <a:pPr lvl="1"/>
             <a:r>
-              <a:rPr lang="en-US" smtClean="0"/>
+              <a:rPr lang="en-US"/>
               <a:t>Second level</a:t>
             </a:r>
           </a:p>
           <a:p>
             <a:pPr lvl="2"/>
             <a:r>
-              <a:rPr lang="en-US" smtClean="0"/>
+              <a:rPr lang="en-US"/>
               <a:t>Third level</a:t>
             </a:r>
           </a:p>
           <a:p>
             <a:pPr lvl="3"/>
             <a:r>
-              <a:rPr lang="en-US" smtClean="0"/>
+              <a:rPr lang="en-US"/>
               <a:t>Fourth level</a:t>
             </a:r>
           </a:p>
           <a:p>
             <a:pPr lvl="4"/>
             <a:r>
-              <a:rPr lang="en-US" smtClean="0"/>
+              <a:rPr lang="en-US"/>
               <a:t>Fifth level</a:t>
             </a:r>
-            <a:endParaRPr lang="en-US"/>
           </a:p>
         </p:txBody>
       </p:sp>
@@ -817,7 +825,7 @@
           <a:p>
             <a:fld id="{5BCAD085-E8A6-8845-BD4E-CB4CCA059FC4}" type="datetimeFigureOut">
               <a:rPr lang="en-US" smtClean="0"/>
-              <a:t>1/27/13</a:t>
+              <a:t>11/21/2025</a:t>
             </a:fld>
             <a:endParaRPr lang="en-US"/>
           </a:p>
@@ -920,10 +928,9 @@
           </a:lstStyle>
           <a:p>
             <a:r>
-              <a:rPr lang="en-US" smtClean="0"/>
+              <a:rPr lang="en-US"/>
               <a:t>Click to edit Master title style</a:t>
             </a:r>
-            <a:endParaRPr lang="en-US"/>
           </a:p>
         </p:txBody>
       </p:sp>
@@ -1040,7 +1047,7 @@
           <a:p>
             <a:pPr lvl="0"/>
             <a:r>
-              <a:rPr lang="en-US" smtClean="0"/>
+              <a:rPr lang="en-US"/>
               <a:t>Click to edit Master text styles</a:t>
             </a:r>
           </a:p>
@@ -1063,7 +1070,7 @@
           <a:p>
             <a:fld id="{5BCAD085-E8A6-8845-BD4E-CB4CCA059FC4}" type="datetimeFigureOut">
               <a:rPr lang="en-US" smtClean="0"/>
-              <a:t>1/27/13</a:t>
+              <a:t>11/21/2025</a:t>
             </a:fld>
             <a:endParaRPr lang="en-US"/>
           </a:p>
@@ -1157,10 +1164,9 @@
           <a:lstStyle/>
           <a:p>
             <a:r>
-              <a:rPr lang="en-US" smtClean="0"/>
+              <a:rPr lang="en-US"/>
               <a:t>Click to edit Master title style</a:t>
             </a:r>
-            <a:endParaRPr lang="en-US"/>
           </a:p>
         </p:txBody>
       </p:sp>
@@ -1214,38 +1220,37 @@
           <a:p>
             <a:pPr lvl="0"/>
             <a:r>
-              <a:rPr lang="en-US" smtClean="0"/>
+              <a:rPr lang="en-US"/>
               <a:t>Click to edit Master text styles</a:t>
             </a:r>
           </a:p>
           <a:p>
             <a:pPr lvl="1"/>
             <a:r>
-              <a:rPr lang="en-US" smtClean="0"/>
+              <a:rPr lang="en-US"/>
               <a:t>Second level</a:t>
             </a:r>
           </a:p>
           <a:p>
             <a:pPr lvl="2"/>
             <a:r>
-              <a:rPr lang="en-US" smtClean="0"/>
+              <a:rPr lang="en-US"/>
               <a:t>Third level</a:t>
             </a:r>
           </a:p>
           <a:p>
             <a:pPr lvl="3"/>
             <a:r>
-              <a:rPr lang="en-US" smtClean="0"/>
+              <a:rPr lang="en-US"/>
               <a:t>Fourth level</a:t>
             </a:r>
           </a:p>
           <a:p>
             <a:pPr lvl="4"/>
             <a:r>
-              <a:rPr lang="en-US" smtClean="0"/>
+              <a:rPr lang="en-US"/>
               <a:t>Fifth level</a:t>
             </a:r>
-            <a:endParaRPr lang="en-US"/>
           </a:p>
         </p:txBody>
       </p:sp>
@@ -1299,38 +1304,37 @@
           <a:p>
             <a:pPr lvl="0"/>
             <a:r>
-              <a:rPr lang="en-US" smtClean="0"/>
+              <a:rPr lang="en-US"/>
               <a:t>Click to edit Master text styles</a:t>
             </a:r>
           </a:p>
           <a:p>
             <a:pPr lvl="1"/>
             <a:r>
-              <a:rPr lang="en-US" smtClean="0"/>
+              <a:rPr lang="en-US"/>
               <a:t>Second level</a:t>
             </a:r>
           </a:p>
           <a:p>
             <a:pPr lvl="2"/>
             <a:r>
-              <a:rPr lang="en-US" smtClean="0"/>
+              <a:rPr lang="en-US"/>
               <a:t>Third level</a:t>
             </a:r>
           </a:p>
           <a:p>
             <a:pPr lvl="3"/>
             <a:r>
-              <a:rPr lang="en-US" smtClean="0"/>
+              <a:rPr lang="en-US"/>
               <a:t>Fourth level</a:t>
             </a:r>
           </a:p>
           <a:p>
             <a:pPr lvl="4"/>
             <a:r>
-              <a:rPr lang="en-US" smtClean="0"/>
+              <a:rPr lang="en-US"/>
               <a:t>Fifth level</a:t>
             </a:r>
-            <a:endParaRPr lang="en-US"/>
           </a:p>
         </p:txBody>
       </p:sp>
@@ -1351,7 +1355,7 @@
           <a:p>
             <a:fld id="{5BCAD085-E8A6-8845-BD4E-CB4CCA059FC4}" type="datetimeFigureOut">
               <a:rPr lang="en-US" smtClean="0"/>
-              <a:t>1/27/13</a:t>
+              <a:t>11/21/2025</a:t>
             </a:fld>
             <a:endParaRPr lang="en-US"/>
           </a:p>
@@ -1449,10 +1453,9 @@
           </a:lstStyle>
           <a:p>
             <a:r>
-              <a:rPr lang="en-US" smtClean="0"/>
+              <a:rPr lang="en-US"/>
               <a:t>Click to edit Master title style</a:t>
             </a:r>
-            <a:endParaRPr lang="en-US"/>
           </a:p>
         </p:txBody>
       </p:sp>
@@ -1515,7 +1518,7 @@
           <a:p>
             <a:pPr lvl="0"/>
             <a:r>
-              <a:rPr lang="en-US" smtClean="0"/>
+              <a:rPr lang="en-US"/>
               <a:t>Click to edit Master text styles</a:t>
             </a:r>
           </a:p>
@@ -1571,38 +1574,37 @@
           <a:p>
             <a:pPr lvl="0"/>
             <a:r>
-              <a:rPr lang="en-US" smtClean="0"/>
+              <a:rPr lang="en-US"/>
               <a:t>Click to edit Master text styles</a:t>
             </a:r>
           </a:p>
           <a:p>
             <a:pPr lvl="1"/>
             <a:r>
-              <a:rPr lang="en-US" smtClean="0"/>
+              <a:rPr lang="en-US"/>
               <a:t>Second level</a:t>
             </a:r>
           </a:p>
           <a:p>
             <a:pPr lvl="2"/>
             <a:r>
-              <a:rPr lang="en-US" smtClean="0"/>
+              <a:rPr lang="en-US"/>
               <a:t>Third level</a:t>
             </a:r>
           </a:p>
           <a:p>
             <a:pPr lvl="3"/>
             <a:r>
-              <a:rPr lang="en-US" smtClean="0"/>
+              <a:rPr lang="en-US"/>
               <a:t>Fourth level</a:t>
             </a:r>
           </a:p>
           <a:p>
             <a:pPr lvl="4"/>
             <a:r>
-              <a:rPr lang="en-US" smtClean="0"/>
+              <a:rPr lang="en-US"/>
               <a:t>Fifth level</a:t>
             </a:r>
-            <a:endParaRPr lang="en-US"/>
           </a:p>
         </p:txBody>
       </p:sp>
@@ -1665,7 +1667,7 @@
           <a:p>
             <a:pPr lvl="0"/>
             <a:r>
-              <a:rPr lang="en-US" smtClean="0"/>
+              <a:rPr lang="en-US"/>
               <a:t>Click to edit Master text styles</a:t>
             </a:r>
           </a:p>
@@ -1721,38 +1723,37 @@
           <a:p>
             <a:pPr lvl="0"/>
             <a:r>
-              <a:rPr lang="en-US" smtClean="0"/>
+              <a:rPr lang="en-US"/>
               <a:t>Click to edit Master text styles</a:t>
             </a:r>
           </a:p>
           <a:p>
             <a:pPr lvl="1"/>
             <a:r>
-              <a:rPr lang="en-US" smtClean="0"/>
+              <a:rPr lang="en-US"/>
               <a:t>Second level</a:t>
             </a:r>
           </a:p>
           <a:p>
             <a:pPr lvl="2"/>
             <a:r>
-              <a:rPr lang="en-US" smtClean="0"/>
+              <a:rPr lang="en-US"/>
               <a:t>Third level</a:t>
             </a:r>
           </a:p>
           <a:p>
             <a:pPr lvl="3"/>
             <a:r>
-              <a:rPr lang="en-US" smtClean="0"/>
+              <a:rPr lang="en-US"/>
               <a:t>Fourth level</a:t>
             </a:r>
           </a:p>
           <a:p>
             <a:pPr lvl="4"/>
             <a:r>
-              <a:rPr lang="en-US" smtClean="0"/>
+              <a:rPr lang="en-US"/>
               <a:t>Fifth level</a:t>
             </a:r>
-            <a:endParaRPr lang="en-US"/>
           </a:p>
         </p:txBody>
       </p:sp>
@@ -1773,7 +1774,7 @@
           <a:p>
             <a:fld id="{5BCAD085-E8A6-8845-BD4E-CB4CCA059FC4}" type="datetimeFigureOut">
               <a:rPr lang="en-US" smtClean="0"/>
-              <a:t>1/27/13</a:t>
+              <a:t>11/21/2025</a:t>
             </a:fld>
             <a:endParaRPr lang="en-US"/>
           </a:p>
@@ -1867,10 +1868,9 @@
           <a:lstStyle/>
           <a:p>
             <a:r>
-              <a:rPr lang="en-US" smtClean="0"/>
+              <a:rPr lang="en-US"/>
               <a:t>Click to edit Master title style</a:t>
             </a:r>
-            <a:endParaRPr lang="en-US"/>
           </a:p>
         </p:txBody>
       </p:sp>
@@ -1891,7 +1891,7 @@
           <a:p>
             <a:fld id="{5BCAD085-E8A6-8845-BD4E-CB4CCA059FC4}" type="datetimeFigureOut">
               <a:rPr lang="en-US" smtClean="0"/>
-              <a:t>1/27/13</a:t>
+              <a:t>11/21/2025</a:t>
             </a:fld>
             <a:endParaRPr lang="en-US"/>
           </a:p>
@@ -1986,7 +1986,7 @@
           <a:p>
             <a:fld id="{5BCAD085-E8A6-8845-BD4E-CB4CCA059FC4}" type="datetimeFigureOut">
               <a:rPr lang="en-US" smtClean="0"/>
-              <a:t>1/27/13</a:t>
+              <a:t>11/21/2025</a:t>
             </a:fld>
             <a:endParaRPr lang="en-US"/>
           </a:p>
@@ -2089,10 +2089,9 @@
           </a:lstStyle>
           <a:p>
             <a:r>
-              <a:rPr lang="en-US" smtClean="0"/>
+              <a:rPr lang="en-US"/>
               <a:t>Click to edit Master title style</a:t>
             </a:r>
-            <a:endParaRPr lang="en-US"/>
           </a:p>
         </p:txBody>
       </p:sp>
@@ -2146,38 +2145,37 @@
           <a:p>
             <a:pPr lvl="0"/>
             <a:r>
-              <a:rPr lang="en-US" smtClean="0"/>
+              <a:rPr lang="en-US"/>
               <a:t>Click to edit Master text styles</a:t>
             </a:r>
           </a:p>
           <a:p>
             <a:pPr lvl="1"/>
             <a:r>
-              <a:rPr lang="en-US" smtClean="0"/>
+              <a:rPr lang="en-US"/>
               <a:t>Second level</a:t>
             </a:r>
           </a:p>
           <a:p>
             <a:pPr lvl="2"/>
             <a:r>
-              <a:rPr lang="en-US" smtClean="0"/>
+              <a:rPr lang="en-US"/>
               <a:t>Third level</a:t>
             </a:r>
           </a:p>
           <a:p>
             <a:pPr lvl="3"/>
             <a:r>
-              <a:rPr lang="en-US" smtClean="0"/>
+              <a:rPr lang="en-US"/>
               <a:t>Fourth level</a:t>
             </a:r>
           </a:p>
           <a:p>
             <a:pPr lvl="4"/>
             <a:r>
-              <a:rPr lang="en-US" smtClean="0"/>
+              <a:rPr lang="en-US"/>
               <a:t>Fifth level</a:t>
             </a:r>
-            <a:endParaRPr lang="en-US"/>
           </a:p>
         </p:txBody>
       </p:sp>
@@ -2240,7 +2238,7 @@
           <a:p>
             <a:pPr lvl="0"/>
             <a:r>
-              <a:rPr lang="en-US" smtClean="0"/>
+              <a:rPr lang="en-US"/>
               <a:t>Click to edit Master text styles</a:t>
             </a:r>
           </a:p>
@@ -2263,7 +2261,7 @@
           <a:p>
             <a:fld id="{5BCAD085-E8A6-8845-BD4E-CB4CCA059FC4}" type="datetimeFigureOut">
               <a:rPr lang="en-US" smtClean="0"/>
-              <a:t>1/27/13</a:t>
+              <a:t>11/21/2025</a:t>
             </a:fld>
             <a:endParaRPr lang="en-US"/>
           </a:p>
@@ -2366,10 +2364,9 @@
           </a:lstStyle>
           <a:p>
             <a:r>
-              <a:rPr lang="en-US" smtClean="0"/>
+              <a:rPr lang="en-US"/>
               <a:t>Click to edit Master title style</a:t>
             </a:r>
-            <a:endParaRPr lang="en-US"/>
           </a:p>
         </p:txBody>
       </p:sp>
@@ -2493,7 +2490,7 @@
           <a:p>
             <a:pPr lvl="0"/>
             <a:r>
-              <a:rPr lang="en-US" smtClean="0"/>
+              <a:rPr lang="en-US"/>
               <a:t>Click to edit Master text styles</a:t>
             </a:r>
           </a:p>
@@ -2516,7 +2513,7 @@
           <a:p>
             <a:fld id="{5BCAD085-E8A6-8845-BD4E-CB4CCA059FC4}" type="datetimeFigureOut">
               <a:rPr lang="en-US" smtClean="0"/>
-              <a:t>1/27/13</a:t>
+              <a:t>11/21/2025</a:t>
             </a:fld>
             <a:endParaRPr lang="en-US"/>
           </a:p>
@@ -2625,10 +2622,9 @@
           <a:lstStyle/>
           <a:p>
             <a:r>
-              <a:rPr lang="en-US" smtClean="0"/>
+              <a:rPr lang="en-US"/>
               <a:t>Click to edit Master title style</a:t>
             </a:r>
-            <a:endParaRPr lang="en-US"/>
           </a:p>
         </p:txBody>
       </p:sp>
@@ -2659,38 +2655,37 @@
           <a:p>
             <a:pPr lvl="0"/>
             <a:r>
-              <a:rPr lang="en-US" smtClean="0"/>
+              <a:rPr lang="en-US"/>
               <a:t>Click to edit Master text styles</a:t>
             </a:r>
           </a:p>
           <a:p>
             <a:pPr lvl="1"/>
             <a:r>
-              <a:rPr lang="en-US" smtClean="0"/>
+              <a:rPr lang="en-US"/>
               <a:t>Second level</a:t>
             </a:r>
           </a:p>
           <a:p>
             <a:pPr lvl="2"/>
             <a:r>
-              <a:rPr lang="en-US" smtClean="0"/>
+              <a:rPr lang="en-US"/>
               <a:t>Third level</a:t>
             </a:r>
           </a:p>
           <a:p>
             <a:pPr lvl="3"/>
             <a:r>
-              <a:rPr lang="en-US" smtClean="0"/>
+              <a:rPr lang="en-US"/>
               <a:t>Fourth level</a:t>
             </a:r>
           </a:p>
           <a:p>
             <a:pPr lvl="4"/>
             <a:r>
-              <a:rPr lang="en-US" smtClean="0"/>
+              <a:rPr lang="en-US"/>
               <a:t>Fifth level</a:t>
             </a:r>
-            <a:endParaRPr lang="en-US"/>
           </a:p>
         </p:txBody>
       </p:sp>
@@ -2729,7 +2724,7 @@
           <a:p>
             <a:fld id="{5BCAD085-E8A6-8845-BD4E-CB4CCA059FC4}" type="datetimeFigureOut">
               <a:rPr lang="en-US" smtClean="0"/>
-              <a:t>1/27/13</a:t>
+              <a:t>11/21/2025</a:t>
             </a:fld>
             <a:endParaRPr lang="en-US"/>
           </a:p>
@@ -3088,7 +3083,7 @@
 </file>
 
 <file path=ppt/slides/slide1.xml><?xml version="1.0" encoding="utf-8"?>
-<p:sld xmlns:a="http://schemas.openxmlformats.org/drawingml/2006/main" xmlns:p="http://schemas.openxmlformats.org/presentationml/2006/main" xmlns:r="http://schemas.openxmlformats.org/officeDocument/2006/relationships">
+<p:sld xmlns:a="http://schemas.openxmlformats.org/drawingml/2006/main" xmlns:r="http://schemas.openxmlformats.org/officeDocument/2006/relationships" xmlns:p="http://schemas.openxmlformats.org/presentationml/2006/main">
   <p:cSld>
     <p:spTree>
       <p:nvGrpSpPr>
@@ -3096,7 +3091,14 @@
         <p:cNvGrpSpPr/>
         <p:nvPr/>
       </p:nvGrpSpPr>
-      <p:grpSpPr/>
+      <p:grpSpPr>
+        <a:xfrm>
+          <a:off x="0" y="0"/>
+          <a:ext cx="0" cy="0"/>
+          <a:chOff x="0" y="0"/>
+          <a:chExt cx="0" cy="0"/>
+        </a:xfrm>
+      </p:grpSpPr>
       <p:sp>
         <p:nvSpPr>
           <p:cNvPr id="2" name="Title 1"/>
@@ -3113,6 +3115,7 @@
           <a:lstStyle/>
           <a:p>
             <a:r>
+              <a:rPr dirty="0"/>
               <a:t>UDP-Based Media Streaming Application</a:t>
             </a:r>
           </a:p>
@@ -3120,7 +3123,13 @@
       </p:sp>
       <p:sp>
         <p:nvSpPr>
-          <p:cNvPr id="3" name="Subtitle 2"/>
+          <p:cNvPr id="5" name="Subtitle 4">
+            <a:extLst>
+              <a:ext uri="{FF2B5EF4-FFF2-40B4-BE49-F238E27FC236}">
+                <a16:creationId xmlns:a16="http://schemas.microsoft.com/office/drawing/2014/main" id="{A5DB2272-90CE-E47E-EF6F-85BCA91EFB40}"/>
+              </a:ext>
+            </a:extLst>
+          </p:cNvPr>
           <p:cNvSpPr>
             <a:spLocks noGrp="1"/>
           </p:cNvSpPr>
@@ -3128,25 +3137,35 @@
             <p:ph type="subTitle" idx="1"/>
           </p:nvPr>
         </p:nvSpPr>
-        <p:spPr/>
-        <p:txBody>
-          <a:bodyPr/>
-          <a:lstStyle/>
-          <a:p>
-            <a:r>
-              <a:t>Final Lab Project Implementation</a:t>
-            </a:r>
-          </a:p>
-          <a:p>
-            <a:r>
-              <a:t>Connectionless Sockets &amp; Random Packet Distribution</a:t>
-            </a:r>
-          </a:p>
-          <a:p/>
-          <a:p>
-            <a:r>
-              <a:t>Presented by: [Your Name]</a:t>
-            </a:r>
+        <p:spPr>
+          <a:xfrm>
+            <a:off x="1371600" y="4364372"/>
+            <a:ext cx="6400800" cy="1752600"/>
+          </a:xfrm>
+        </p:spPr>
+        <p:txBody>
+          <a:bodyPr/>
+          <a:lstStyle/>
+          <a:p>
+            <a:r>
+              <a:rPr lang="en-US" dirty="0"/>
+              <a:t>Prosenjit Mondol</a:t>
+            </a:r>
+          </a:p>
+          <a:p>
+            <a:r>
+              <a:rPr lang="en-US" sz="2800" dirty="0"/>
+              <a:t>ID-2102049</a:t>
+            </a:r>
+          </a:p>
+          <a:p>
+            <a:r>
+              <a:rPr lang="en-US" sz="2800" dirty="0"/>
+              <a:t>Reg-10176</a:t>
+            </a:r>
+          </a:p>
+          <a:p>
+            <a:endParaRPr lang="en-US" dirty="0"/>
           </a:p>
         </p:txBody>
       </p:sp>
@@ -3159,7 +3178,7 @@
 </file>
 
 <file path=ppt/slides/slide10.xml><?xml version="1.0" encoding="utf-8"?>
-<p:sld xmlns:a="http://schemas.openxmlformats.org/drawingml/2006/main" xmlns:p="http://schemas.openxmlformats.org/presentationml/2006/main" xmlns:r="http://schemas.openxmlformats.org/officeDocument/2006/relationships">
+<p:sld xmlns:a="http://schemas.openxmlformats.org/drawingml/2006/main" xmlns:r="http://schemas.openxmlformats.org/officeDocument/2006/relationships" xmlns:p="http://schemas.openxmlformats.org/presentationml/2006/main">
   <p:cSld>
     <p:spTree>
       <p:nvGrpSpPr>
@@ -3167,7 +3186,14 @@
         <p:cNvGrpSpPr/>
         <p:nvPr/>
       </p:nvGrpSpPr>
-      <p:grpSpPr/>
+      <p:grpSpPr>
+        <a:xfrm>
+          <a:off x="0" y="0"/>
+          <a:ext cx="0" cy="0"/>
+          <a:chOff x="0" y="0"/>
+          <a:chExt cx="0" cy="0"/>
+        </a:xfrm>
+      </p:grpSpPr>
       <p:sp>
         <p:nvSpPr>
           <p:cNvPr id="2" name="Title 1"/>
@@ -3203,12 +3229,15 @@
         <p:txBody>
           <a:bodyPr/>
           <a:lstStyle/>
-          <a:p/>
-          <a:p>
-            <a:pPr>
-              <a:defRPr sz="2000"/>
-            </a:pPr>
-            <a:r>
+          <a:p>
+            <a:endParaRPr dirty="0"/>
+          </a:p>
+          <a:p>
+            <a:pPr>
+              <a:defRPr sz="2000"/>
+            </a:pPr>
+            <a:r>
+              <a:rPr dirty="0"/>
               <a:t>Summary:</a:t>
             </a:r>
           </a:p>
@@ -3217,6 +3246,7 @@
               <a:defRPr sz="2000"/>
             </a:pPr>
             <a:r>
+              <a:rPr dirty="0"/>
               <a:t>- Successfully implemented connectionless streaming.</a:t>
             </a:r>
           </a:p>
@@ -3225,6 +3255,7 @@
               <a:defRPr sz="2000"/>
             </a:pPr>
             <a:r>
+              <a:rPr dirty="0"/>
               <a:t>- Met all strict packet size requirements.</a:t>
             </a:r>
           </a:p>
@@ -3232,12 +3263,14 @@
             <a:pPr>
               <a:defRPr sz="2000"/>
             </a:pPr>
-          </a:p>
-          <a:p>
-            <a:pPr>
-              <a:defRPr sz="2000"/>
-            </a:pPr>
-            <a:r>
+            <a:endParaRPr dirty="0"/>
+          </a:p>
+          <a:p>
+            <a:pPr>
+              <a:defRPr sz="2000"/>
+            </a:pPr>
+            <a:r>
+              <a:rPr dirty="0"/>
               <a:t>Future Improvements:</a:t>
             </a:r>
           </a:p>
@@ -3246,6 +3279,7 @@
               <a:defRPr sz="2000"/>
             </a:pPr>
             <a:r>
+              <a:rPr dirty="0"/>
               <a:t>- Add Sequence Numbers for packet ordering.</a:t>
             </a:r>
           </a:p>
@@ -3254,6 +3288,7 @@
               <a:defRPr sz="2000"/>
             </a:pPr>
             <a:r>
+              <a:rPr dirty="0"/>
               <a:t>- Implement reliability layer (ACKs) if needed.</a:t>
             </a:r>
           </a:p>
@@ -3261,12 +3296,14 @@
             <a:pPr>
               <a:defRPr sz="2000"/>
             </a:pPr>
-          </a:p>
-          <a:p>
-            <a:pPr>
-              <a:defRPr sz="2000"/>
-            </a:pPr>
-            <a:r>
+            <a:endParaRPr dirty="0"/>
+          </a:p>
+          <a:p>
+            <a:pPr>
+              <a:defRPr sz="2000"/>
+            </a:pPr>
+            <a:r>
+              <a:rPr dirty="0"/>
               <a:t>Thank You. Questions?</a:t>
             </a:r>
           </a:p>
@@ -3281,7 +3318,7 @@
 </file>
 
 <file path=ppt/slides/slide2.xml><?xml version="1.0" encoding="utf-8"?>
-<p:sld xmlns:a="http://schemas.openxmlformats.org/drawingml/2006/main" xmlns:p="http://schemas.openxmlformats.org/presentationml/2006/main" xmlns:r="http://schemas.openxmlformats.org/officeDocument/2006/relationships">
+<p:sld xmlns:a="http://schemas.openxmlformats.org/drawingml/2006/main" xmlns:r="http://schemas.openxmlformats.org/officeDocument/2006/relationships" xmlns:p="http://schemas.openxmlformats.org/presentationml/2006/main">
   <p:cSld>
     <p:spTree>
       <p:nvGrpSpPr>
@@ -3289,7 +3326,14 @@
         <p:cNvGrpSpPr/>
         <p:nvPr/>
       </p:nvGrpSpPr>
-      <p:grpSpPr/>
+      <p:grpSpPr>
+        <a:xfrm>
+          <a:off x="0" y="0"/>
+          <a:ext cx="0" cy="0"/>
+          <a:chOff x="0" y="0"/>
+          <a:chExt cx="0" cy="0"/>
+        </a:xfrm>
+      </p:grpSpPr>
       <p:sp>
         <p:nvSpPr>
           <p:cNvPr id="2" name="Title 1"/>
@@ -3325,12 +3369,15 @@
         <p:txBody>
           <a:bodyPr/>
           <a:lstStyle/>
-          <a:p/>
-          <a:p>
-            <a:pPr>
-              <a:defRPr sz="2000"/>
-            </a:pPr>
-            <a:r>
+          <a:p>
+            <a:endParaRPr dirty="0"/>
+          </a:p>
+          <a:p>
+            <a:pPr>
+              <a:defRPr sz="2000"/>
+            </a:pPr>
+            <a:r>
+              <a:rPr dirty="0"/>
               <a:t>Develop a client-server multimedia streaming application.</a:t>
             </a:r>
           </a:p>
@@ -3339,6 +3386,7 @@
               <a:defRPr sz="2000"/>
             </a:pPr>
             <a:r>
+              <a:rPr dirty="0"/>
               <a:t>Utilize Connectionless Sockets (UDP) instead of TCP.</a:t>
             </a:r>
           </a:p>
@@ -3347,6 +3395,7 @@
               <a:defRPr sz="2000"/>
             </a:pPr>
             <a:r>
+              <a:rPr dirty="0"/>
               <a:t>Implement random data packet sizes (1000-2000 bytes).</a:t>
             </a:r>
           </a:p>
@@ -3355,6 +3404,7 @@
               <a:defRPr sz="2000"/>
             </a:pPr>
             <a:r>
+              <a:rPr dirty="0"/>
               <a:t>Achieve Progressive Playback (Watch while downloading).</a:t>
             </a:r>
           </a:p>
@@ -3363,6 +3413,7 @@
               <a:defRPr sz="2000"/>
             </a:pPr>
             <a:r>
+              <a:rPr dirty="0"/>
               <a:t>Create a user-friendly GUI for easy operation.</a:t>
             </a:r>
           </a:p>
@@ -3377,7 +3428,7 @@
 </file>
 
 <file path=ppt/slides/slide3.xml><?xml version="1.0" encoding="utf-8"?>
-<p:sld xmlns:a="http://schemas.openxmlformats.org/drawingml/2006/main" xmlns:p="http://schemas.openxmlformats.org/presentationml/2006/main" xmlns:r="http://schemas.openxmlformats.org/officeDocument/2006/relationships">
+<p:sld xmlns:a="http://schemas.openxmlformats.org/drawingml/2006/main" xmlns:r="http://schemas.openxmlformats.org/officeDocument/2006/relationships" xmlns:p="http://schemas.openxmlformats.org/presentationml/2006/main">
   <p:cSld>
     <p:spTree>
       <p:nvGrpSpPr>
@@ -3385,7 +3436,14 @@
         <p:cNvGrpSpPr/>
         <p:nvPr/>
       </p:nvGrpSpPr>
-      <p:grpSpPr/>
+      <p:grpSpPr>
+        <a:xfrm>
+          <a:off x="0" y="0"/>
+          <a:ext cx="0" cy="0"/>
+          <a:chOff x="0" y="0"/>
+          <a:chExt cx="0" cy="0"/>
+        </a:xfrm>
+      </p:grpSpPr>
       <p:sp>
         <p:nvSpPr>
           <p:cNvPr id="2" name="Title 1"/>
@@ -3421,12 +3479,15 @@
         <p:txBody>
           <a:bodyPr/>
           <a:lstStyle/>
-          <a:p/>
-          <a:p>
-            <a:pPr>
-              <a:defRPr sz="2000"/>
-            </a:pPr>
-            <a:r>
+          <a:p>
+            <a:endParaRPr dirty="0"/>
+          </a:p>
+          <a:p>
+            <a:pPr>
+              <a:defRPr sz="2000"/>
+            </a:pPr>
+            <a:r>
+              <a:rPr dirty="0"/>
               <a:t>1. Protocol: Application must use UDP datagrams.</a:t>
             </a:r>
           </a:p>
@@ -3435,6 +3496,7 @@
               <a:defRPr sz="2000"/>
             </a:pPr>
             <a:r>
+              <a:rPr dirty="0"/>
               <a:t>2. Server: Read file chunks randomly between 1000-2000 bytes.</a:t>
             </a:r>
           </a:p>
@@ -3443,6 +3505,7 @@
               <a:defRPr sz="2000"/>
             </a:pPr>
             <a:r>
+              <a:rPr dirty="0"/>
               <a:t>3. Variable Packets: Handle last packet size &lt; 1000 bytes.</a:t>
             </a:r>
           </a:p>
@@ -3451,6 +3514,7 @@
               <a:defRPr sz="2000"/>
             </a:pPr>
             <a:r>
+              <a:rPr dirty="0"/>
               <a:t>4. Client: Receive bytes and reconstruct the media file.</a:t>
             </a:r>
           </a:p>
@@ -3459,6 +3523,7 @@
               <a:defRPr sz="2000"/>
             </a:pPr>
             <a:r>
+              <a:rPr dirty="0"/>
               <a:t>5. Playback: Launch media player automatically once buffer is filled.</a:t>
             </a:r>
           </a:p>
@@ -3473,7 +3538,7 @@
 </file>
 
 <file path=ppt/slides/slide4.xml><?xml version="1.0" encoding="utf-8"?>
-<p:sld xmlns:a="http://schemas.openxmlformats.org/drawingml/2006/main" xmlns:p="http://schemas.openxmlformats.org/presentationml/2006/main" xmlns:r="http://schemas.openxmlformats.org/officeDocument/2006/relationships">
+<p:sld xmlns:a="http://schemas.openxmlformats.org/drawingml/2006/main" xmlns:r="http://schemas.openxmlformats.org/officeDocument/2006/relationships" xmlns:p="http://schemas.openxmlformats.org/presentationml/2006/main">
   <p:cSld>
     <p:spTree>
       <p:nvGrpSpPr>
@@ -3481,7 +3546,14 @@
         <p:cNvGrpSpPr/>
         <p:nvPr/>
       </p:nvGrpSpPr>
-      <p:grpSpPr/>
+      <p:grpSpPr>
+        <a:xfrm>
+          <a:off x="0" y="0"/>
+          <a:ext cx="0" cy="0"/>
+          <a:chOff x="0" y="0"/>
+          <a:chExt cx="0" cy="0"/>
+        </a:xfrm>
+      </p:grpSpPr>
       <p:sp>
         <p:nvSpPr>
           <p:cNvPr id="2" name="Title 1"/>
@@ -3517,7 +3589,9 @@
         <p:txBody>
           <a:bodyPr/>
           <a:lstStyle/>
-          <a:p/>
+          <a:p>
+            <a:endParaRPr/>
+          </a:p>
           <a:p>
             <a:pPr>
               <a:defRPr sz="2000"/>
@@ -3585,7 +3659,7 @@
 </file>
 
 <file path=ppt/slides/slide5.xml><?xml version="1.0" encoding="utf-8"?>
-<p:sld xmlns:a="http://schemas.openxmlformats.org/drawingml/2006/main" xmlns:p="http://schemas.openxmlformats.org/presentationml/2006/main" xmlns:r="http://schemas.openxmlformats.org/officeDocument/2006/relationships">
+<p:sld xmlns:a="http://schemas.openxmlformats.org/drawingml/2006/main" xmlns:r="http://schemas.openxmlformats.org/officeDocument/2006/relationships" xmlns:p="http://schemas.openxmlformats.org/presentationml/2006/main">
   <p:cSld>
     <p:spTree>
       <p:nvGrpSpPr>
@@ -3593,7 +3667,14 @@
         <p:cNvGrpSpPr/>
         <p:nvPr/>
       </p:nvGrpSpPr>
-      <p:grpSpPr/>
+      <p:grpSpPr>
+        <a:xfrm>
+          <a:off x="0" y="0"/>
+          <a:ext cx="0" cy="0"/>
+          <a:chOff x="0" y="0"/>
+          <a:chExt cx="0" cy="0"/>
+        </a:xfrm>
+      </p:grpSpPr>
       <p:sp>
         <p:nvSpPr>
           <p:cNvPr id="2" name="Title 1"/>
@@ -3629,12 +3710,15 @@
         <p:txBody>
           <a:bodyPr/>
           <a:lstStyle/>
-          <a:p/>
-          <a:p>
-            <a:pPr>
-              <a:defRPr sz="2000"/>
-            </a:pPr>
-            <a:r>
+          <a:p>
+            <a:endParaRPr dirty="0"/>
+          </a:p>
+          <a:p>
+            <a:pPr>
+              <a:defRPr sz="2000"/>
+            </a:pPr>
+            <a:r>
+              <a:rPr dirty="0"/>
               <a:t>1. Request: Client sends 'START' command to Server.</a:t>
             </a:r>
           </a:p>
@@ -3643,6 +3727,7 @@
               <a:defRPr sz="2000"/>
             </a:pPr>
             <a:r>
+              <a:rPr dirty="0"/>
               <a:t>2. Processing: Server reads file in random chunks.</a:t>
             </a:r>
           </a:p>
@@ -3651,6 +3736,7 @@
               <a:defRPr sz="2000"/>
             </a:pPr>
             <a:r>
+              <a:rPr dirty="0"/>
               <a:t>3. Transport: Chunks sent as UDP Datagrams over network.</a:t>
             </a:r>
           </a:p>
@@ -3659,6 +3745,7 @@
               <a:defRPr sz="2000"/>
             </a:pPr>
             <a:r>
+              <a:rPr dirty="0"/>
               <a:t>4. Assembly: Client writes received bytes to temp file.</a:t>
             </a:r>
           </a:p>
@@ -3667,15 +3754,12 @@
               <a:defRPr sz="2000"/>
             </a:pPr>
             <a:r>
-              <a:t>5. Trigger: Media player launches when buffer hits 100KB.</a:t>
-            </a:r>
-          </a:p>
-          <a:p>
-            <a:pPr>
-              <a:defRPr sz="2000"/>
-            </a:pPr>
-            <a:r>
-              <a:t>(Visual diagram to be explained during demo)</a:t>
+              <a:rPr dirty="0"/>
+              <a:t>5. Trigger: Media player launches when buffer hits 100KB</a:t>
+            </a:r>
+            <a:r>
+              <a:rPr lang="en-US" dirty="0"/>
+              <a:t>.</a:t>
             </a:r>
           </a:p>
         </p:txBody>
@@ -3689,7 +3773,7 @@
 </file>
 
 <file path=ppt/slides/slide6.xml><?xml version="1.0" encoding="utf-8"?>
-<p:sld xmlns:a="http://schemas.openxmlformats.org/drawingml/2006/main" xmlns:p="http://schemas.openxmlformats.org/presentationml/2006/main" xmlns:r="http://schemas.openxmlformats.org/officeDocument/2006/relationships">
+<p:sld xmlns:a="http://schemas.openxmlformats.org/drawingml/2006/main" xmlns:r="http://schemas.openxmlformats.org/officeDocument/2006/relationships" xmlns:p="http://schemas.openxmlformats.org/presentationml/2006/main">
   <p:cSld>
     <p:spTree>
       <p:nvGrpSpPr>
@@ -3697,7 +3781,14 @@
         <p:cNvGrpSpPr/>
         <p:nvPr/>
       </p:nvGrpSpPr>
-      <p:grpSpPr/>
+      <p:grpSpPr>
+        <a:xfrm>
+          <a:off x="0" y="0"/>
+          <a:ext cx="0" cy="0"/>
+          <a:chOff x="0" y="0"/>
+          <a:chExt cx="0" cy="0"/>
+        </a:xfrm>
+      </p:grpSpPr>
       <p:sp>
         <p:nvSpPr>
           <p:cNvPr id="2" name="Title 1"/>
@@ -3733,7 +3824,9 @@
         <p:txBody>
           <a:bodyPr/>
           <a:lstStyle/>
-          <a:p/>
+          <a:p>
+            <a:endParaRPr/>
+          </a:p>
           <a:p>
             <a:pPr>
               <a:defRPr sz="2000"/>
@@ -3746,6 +3839,7 @@
             <a:pPr>
               <a:defRPr sz="2000"/>
             </a:pPr>
+            <a:endParaRPr/>
           </a:p>
           <a:p>
             <a:pPr>
@@ -3775,6 +3869,7 @@
             <a:pPr>
               <a:defRPr sz="2000"/>
             </a:pPr>
+            <a:endParaRPr/>
           </a:p>
           <a:p>
             <a:pPr>
@@ -3811,7 +3906,7 @@
 </file>
 
 <file path=ppt/slides/slide7.xml><?xml version="1.0" encoding="utf-8"?>
-<p:sld xmlns:a="http://schemas.openxmlformats.org/drawingml/2006/main" xmlns:p="http://schemas.openxmlformats.org/presentationml/2006/main" xmlns:r="http://schemas.openxmlformats.org/officeDocument/2006/relationships">
+<p:sld xmlns:a="http://schemas.openxmlformats.org/drawingml/2006/main" xmlns:r="http://schemas.openxmlformats.org/officeDocument/2006/relationships" xmlns:p="http://schemas.openxmlformats.org/presentationml/2006/main">
   <p:cSld>
     <p:spTree>
       <p:nvGrpSpPr>
@@ -3819,7 +3914,14 @@
         <p:cNvGrpSpPr/>
         <p:nvPr/>
       </p:nvGrpSpPr>
-      <p:grpSpPr/>
+      <p:grpSpPr>
+        <a:xfrm>
+          <a:off x="0" y="0"/>
+          <a:ext cx="0" cy="0"/>
+          <a:chOff x="0" y="0"/>
+          <a:chExt cx="0" cy="0"/>
+        </a:xfrm>
+      </p:grpSpPr>
       <p:sp>
         <p:nvSpPr>
           <p:cNvPr id="2" name="Title 1"/>
@@ -3855,12 +3957,15 @@
         <p:txBody>
           <a:bodyPr/>
           <a:lstStyle/>
-          <a:p/>
-          <a:p>
-            <a:pPr>
-              <a:defRPr sz="2000"/>
-            </a:pPr>
-            <a:r>
+          <a:p>
+            <a:endParaRPr dirty="0"/>
+          </a:p>
+          <a:p>
+            <a:pPr>
+              <a:defRPr sz="2000"/>
+            </a:pPr>
+            <a:r>
+              <a:rPr dirty="0"/>
               <a:t>Meeting the Playback Requirement:</a:t>
             </a:r>
           </a:p>
@@ -3869,6 +3974,7 @@
               <a:defRPr sz="2000"/>
             </a:pPr>
             <a:r>
+              <a:rPr dirty="0"/>
               <a:t>- Multi-threaded approach (GUI + Receiver Thread).</a:t>
             </a:r>
           </a:p>
@@ -3876,41 +3982,71 @@
             <a:pPr>
               <a:defRPr sz="2000"/>
             </a:pPr>
-          </a:p>
-          <a:p>
-            <a:pPr>
-              <a:defRPr sz="2000"/>
-            </a:pPr>
-            <a:r>
-              <a:t>if bytes_received &gt;= BUFFER_THRESHOLD:</a:t>
-            </a:r>
-          </a:p>
-          <a:p>
-            <a:pPr>
-              <a:defRPr sz="2000"/>
-            </a:pPr>
-            <a:r>
-              <a:t>    if not playback_started:</a:t>
-            </a:r>
-          </a:p>
-          <a:p>
-            <a:pPr>
-              <a:defRPr sz="2000"/>
-            </a:pPr>
-            <a:r>
-              <a:t>        launch_media_player()</a:t>
-            </a:r>
-          </a:p>
-          <a:p>
-            <a:pPr>
-              <a:defRPr sz="2000"/>
-            </a:pPr>
-          </a:p>
-          <a:p>
-            <a:pPr>
-              <a:defRPr sz="2000"/>
-            </a:pPr>
-            <a:r>
+            <a:endParaRPr dirty="0"/>
+          </a:p>
+          <a:p>
+            <a:pPr>
+              <a:defRPr sz="2000"/>
+            </a:pPr>
+            <a:r>
+              <a:rPr dirty="0"/>
+              <a:t>if </a:t>
+            </a:r>
+            <a:r>
+              <a:rPr dirty="0" err="1"/>
+              <a:t>bytes_received</a:t>
+            </a:r>
+            <a:r>
+              <a:rPr dirty="0"/>
+              <a:t> &gt;= BUFFER_THRESHOLD:</a:t>
+            </a:r>
+          </a:p>
+          <a:p>
+            <a:pPr>
+              <a:defRPr sz="2000"/>
+            </a:pPr>
+            <a:r>
+              <a:rPr dirty="0"/>
+              <a:t>    if not </a:t>
+            </a:r>
+            <a:r>
+              <a:rPr dirty="0" err="1"/>
+              <a:t>playback_started</a:t>
+            </a:r>
+            <a:r>
+              <a:rPr dirty="0"/>
+              <a:t>:</a:t>
+            </a:r>
+          </a:p>
+          <a:p>
+            <a:pPr>
+              <a:defRPr sz="2000"/>
+            </a:pPr>
+            <a:r>
+              <a:rPr dirty="0"/>
+              <a:t>        </a:t>
+            </a:r>
+            <a:r>
+              <a:rPr dirty="0" err="1"/>
+              <a:t>launch_media_player</a:t>
+            </a:r>
+            <a:r>
+              <a:rPr dirty="0"/>
+              <a:t>()</a:t>
+            </a:r>
+          </a:p>
+          <a:p>
+            <a:pPr>
+              <a:defRPr sz="2000"/>
+            </a:pPr>
+            <a:endParaRPr dirty="0"/>
+          </a:p>
+          <a:p>
+            <a:pPr>
+              <a:defRPr sz="2000"/>
+            </a:pPr>
+            <a:r>
+              <a:rPr dirty="0"/>
               <a:t>- Ensures video plays before download completes.</a:t>
             </a:r>
           </a:p>
@@ -3919,6 +4055,7 @@
               <a:defRPr sz="2000"/>
             </a:pPr>
             <a:r>
+              <a:rPr dirty="0"/>
               <a:t>- Keeps UI responsive during transfer.</a:t>
             </a:r>
           </a:p>
@@ -3933,7 +4070,7 @@
 </file>
 
 <file path=ppt/slides/slide8.xml><?xml version="1.0" encoding="utf-8"?>
-<p:sld xmlns:a="http://schemas.openxmlformats.org/drawingml/2006/main" xmlns:p="http://schemas.openxmlformats.org/presentationml/2006/main" xmlns:r="http://schemas.openxmlformats.org/officeDocument/2006/relationships">
+<p:sld xmlns:a="http://schemas.openxmlformats.org/drawingml/2006/main" xmlns:r="http://schemas.openxmlformats.org/officeDocument/2006/relationships" xmlns:p="http://schemas.openxmlformats.org/presentationml/2006/main">
   <p:cSld>
     <p:spTree>
       <p:nvGrpSpPr>
@@ -3941,7 +4078,14 @@
         <p:cNvGrpSpPr/>
         <p:nvPr/>
       </p:nvGrpSpPr>
-      <p:grpSpPr/>
+      <p:grpSpPr>
+        <a:xfrm>
+          <a:off x="0" y="0"/>
+          <a:ext cx="0" cy="0"/>
+          <a:chOff x="0" y="0"/>
+          <a:chExt cx="0" cy="0"/>
+        </a:xfrm>
+      </p:grpSpPr>
       <p:sp>
         <p:nvSpPr>
           <p:cNvPr id="2" name="Title 1"/>
@@ -3977,7 +4121,9 @@
         <p:txBody>
           <a:bodyPr/>
           <a:lstStyle/>
-          <a:p/>
+          <a:p>
+            <a:endParaRPr/>
+          </a:p>
           <a:p>
             <a:pPr>
               <a:defRPr sz="2000"/>
@@ -4045,7 +4191,7 @@
 </file>
 
 <file path=ppt/slides/slide9.xml><?xml version="1.0" encoding="utf-8"?>
-<p:sld xmlns:a="http://schemas.openxmlformats.org/drawingml/2006/main" xmlns:p="http://schemas.openxmlformats.org/presentationml/2006/main" xmlns:r="http://schemas.openxmlformats.org/officeDocument/2006/relationships">
+<p:sld xmlns:a="http://schemas.openxmlformats.org/drawingml/2006/main" xmlns:r="http://schemas.openxmlformats.org/officeDocument/2006/relationships" xmlns:p="http://schemas.openxmlformats.org/presentationml/2006/main">
   <p:cSld>
     <p:spTree>
       <p:nvGrpSpPr>
@@ -4053,7 +4199,14 @@
         <p:cNvGrpSpPr/>
         <p:nvPr/>
       </p:nvGrpSpPr>
-      <p:grpSpPr/>
+      <p:grpSpPr>
+        <a:xfrm>
+          <a:off x="0" y="0"/>
+          <a:ext cx="0" cy="0"/>
+          <a:chOff x="0" y="0"/>
+          <a:chExt cx="0" cy="0"/>
+        </a:xfrm>
+      </p:grpSpPr>
       <p:sp>
         <p:nvSpPr>
           <p:cNvPr id="2" name="Title 1"/>
